--- a/BISL504_Final_Project_Presentation.pptx
+++ b/BISL504_Final_Project_Presentation.pptx
@@ -4377,7 +4377,7 @@
                 </a:solidFill>
                 <a:latin typeface="Aptos"/>
               </a:rPr>
-              <a:t>The saved clean file is the shared basis for the notebook and dashboard.</a:t>
+              <a:t>A reproducible build turns the selected-column source into the country-year analysis table.</a:t>
             </a:r>
             <a:endParaRPr lang="en-US" sz="1250"/>
           </a:p>
@@ -4414,31 +4414,31 @@
         <p:spPr>
           <a:xfrm>
             <a:off x="1024128" y="1847088"/>
-            <a:ext cx="4828032" cy="649224"/>
-          </a:xfrm>
-          <a:prstGeom prst="rect">
-            <a:avLst/>
-          </a:prstGeom>
-          <a:noFill/>
-          <a:ln>
-            <a:noFill/>
-          </a:ln>
-        </p:spPr>
-        <p:txBody>
-          <a:bodyPr wrap="square" anchor="ctr" lIns="18288" rIns="18288" tIns="18288" bIns="18288"/>
-          <a:lstStyle/>
-          <a:p>
-            <a:pPr/>
-            <a:r>
-              <a:rPr lang="en-US" sz="1500" b="0">
+            <a:ext cx="4828032" cy="694944"/>
+          </a:xfrm>
+          <a:prstGeom prst="rect">
+            <a:avLst/>
+          </a:prstGeom>
+          <a:noFill/>
+          <a:ln>
+            <a:noFill/>
+          </a:ln>
+        </p:spPr>
+        <p:txBody>
+          <a:bodyPr wrap="square" anchor="ctr" lIns="18288" rIns="18288" tIns="18288" bIns="18288"/>
+          <a:lstStyle/>
+          <a:p>
+            <a:pPr/>
+            <a:r>
+              <a:rPr lang="en-US" sz="1400" b="0">
                 <a:solidFill>
                   <a:srgbClr val="183B56"/>
                 </a:solidFill>
                 <a:latin typeface="Aptos"/>
               </a:rPr>
-              <a:t>Repaired formatting artifacts in column names.</a:t>
-            </a:r>
-            <a:endParaRPr lang="en-US" sz="1500"/>
+              <a:t>1,200 source rows become 400 country-year rows across 25 countries.</a:t>
+            </a:r>
+            <a:endParaRPr lang="en-US" sz="1400"/>
           </a:p>
         </p:txBody>
       </p:sp>
@@ -4450,7 +4450,7 @@
         </p:nvSpPr>
         <p:spPr>
           <a:xfrm>
-            <a:off x="822960" y="2670048"/>
+            <a:off x="822960" y="2715768"/>
             <a:ext cx="82296" cy="82296"/>
           </a:xfrm>
           <a:prstGeom prst="rect">
@@ -4472,32 +4472,32 @@
         </p:nvSpPr>
         <p:spPr>
           <a:xfrm>
-            <a:off x="1024128" y="2551176"/>
-            <a:ext cx="4828032" cy="649224"/>
-          </a:xfrm>
-          <a:prstGeom prst="rect">
-            <a:avLst/>
-          </a:prstGeom>
-          <a:noFill/>
-          <a:ln>
-            <a:noFill/>
-          </a:ln>
-        </p:spPr>
-        <p:txBody>
-          <a:bodyPr wrap="square" anchor="ctr" lIns="18288" rIns="18288" tIns="18288" bIns="18288"/>
-          <a:lstStyle/>
-          <a:p>
-            <a:pPr/>
-            <a:r>
-              <a:rPr lang="en-US" sz="1500" b="0">
+            <a:off x="1024128" y="2596896"/>
+            <a:ext cx="4828032" cy="694944"/>
+          </a:xfrm>
+          <a:prstGeom prst="rect">
+            <a:avLst/>
+          </a:prstGeom>
+          <a:noFill/>
+          <a:ln>
+            <a:noFill/>
+          </a:ln>
+        </p:spPr>
+        <p:txBody>
+          <a:bodyPr wrap="square" anchor="ctr" lIns="18288" rIns="18288" tIns="18288" bIns="18288"/>
+          <a:lstStyle/>
+          <a:p>
+            <a:pPr/>
+            <a:r>
+              <a:rPr lang="en-US" sz="1400" b="0">
                 <a:solidFill>
                   <a:srgbClr val="183B56"/>
                 </a:solidFill>
                 <a:latin typeface="Aptos"/>
               </a:rPr>
-              <a:t>Converted year and analysis fields to numeric values.</a:t>
-            </a:r>
-            <a:endParaRPr lang="en-US" sz="1500"/>
+              <a:t>Each country-year has three source records; the file has no segment key explaining them.</a:t>
+            </a:r>
+            <a:endParaRPr lang="en-US" sz="1400"/>
           </a:p>
         </p:txBody>
       </p:sp>
@@ -4509,7 +4509,7 @@
         </p:nvSpPr>
         <p:spPr>
           <a:xfrm>
-            <a:off x="822960" y="3374136"/>
+            <a:off x="822960" y="3465576"/>
             <a:ext cx="82296" cy="82296"/>
           </a:xfrm>
           <a:prstGeom prst="rect">
@@ -4531,32 +4531,32 @@
         </p:nvSpPr>
         <p:spPr>
           <a:xfrm>
-            <a:off x="1024128" y="3255264"/>
-            <a:ext cx="4828032" cy="649224"/>
-          </a:xfrm>
-          <a:prstGeom prst="rect">
-            <a:avLst/>
-          </a:prstGeom>
-          <a:noFill/>
-          <a:ln>
-            <a:noFill/>
-          </a:ln>
-        </p:spPr>
-        <p:txBody>
-          <a:bodyPr wrap="square" anchor="ctr" lIns="18288" rIns="18288" tIns="18288" bIns="18288"/>
-          <a:lstStyle/>
-          <a:p>
-            <a:pPr/>
-            <a:r>
-              <a:rPr lang="en-US" sz="1500" b="0">
+            <a:off x="1024128" y="3346704"/>
+            <a:ext cx="4828032" cy="694944"/>
+          </a:xfrm>
+          <a:prstGeom prst="rect">
+            <a:avLst/>
+          </a:prstGeom>
+          <a:noFill/>
+          <a:ln>
+            <a:noFill/>
+          </a:ln>
+        </p:spPr>
+        <p:txBody>
+          <a:bodyPr wrap="square" anchor="ctr" lIns="18288" rIns="18288" tIns="18288" bIns="18288"/>
+          <a:lstStyle/>
+          <a:p>
+            <a:pPr/>
+            <a:r>
+              <a:rPr lang="en-US" sz="1400" b="0">
                 <a:solidFill>
                   <a:srgbClr val="183B56"/>
                 </a:solidFill>
                 <a:latin typeface="Aptos"/>
               </a:rPr>
-              <a:t>Trimmed country labels; removed rows without country or year.</a:t>
-            </a:r>
-            <a:endParaRPr lang="en-US" sz="1500"/>
+              <a:t>Vehicle sales are summed; shared metrics are kept once only where all three agree.</a:t>
+            </a:r>
+            <a:endParaRPr lang="en-US" sz="1400"/>
           </a:p>
         </p:txBody>
       </p:sp>
@@ -4568,7 +4568,7 @@
         </p:nvSpPr>
         <p:spPr>
           <a:xfrm>
-            <a:off x="822960" y="4078224"/>
+            <a:off x="822960" y="4215384"/>
             <a:ext cx="82296" cy="82296"/>
           </a:xfrm>
           <a:prstGeom prst="rect">
@@ -4590,32 +4590,32 @@
         </p:nvSpPr>
         <p:spPr>
           <a:xfrm>
-            <a:off x="1024128" y="3959352"/>
-            <a:ext cx="4828032" cy="649224"/>
-          </a:xfrm>
-          <a:prstGeom prst="rect">
-            <a:avLst/>
-          </a:prstGeom>
-          <a:noFill/>
-          <a:ln>
-            <a:noFill/>
-          </a:ln>
-        </p:spPr>
-        <p:txBody>
-          <a:bodyPr wrap="square" anchor="ctr" lIns="18288" rIns="18288" tIns="18288" bIns="18288"/>
-          <a:lstStyle/>
-          <a:p>
-            <a:pPr/>
-            <a:r>
-              <a:rPr lang="en-US" sz="1500" b="0">
+            <a:off x="1024128" y="4096512"/>
+            <a:ext cx="4828032" cy="694944"/>
+          </a:xfrm>
+          <a:prstGeom prst="rect">
+            <a:avLst/>
+          </a:prstGeom>
+          <a:noFill/>
+          <a:ln>
+            <a:noFill/>
+          </a:ln>
+        </p:spPr>
+        <p:txBody>
+          <a:bodyPr wrap="square" anchor="ctr" lIns="18288" rIns="18288" tIns="18288" bIns="18288"/>
+          <a:lstStyle/>
+          <a:p>
+            <a:pPr/>
+            <a:r>
+              <a:rPr lang="en-US" sz="1400" b="0">
                 <a:solidFill>
                   <a:srgbClr val="183B56"/>
                 </a:solidFill>
                 <a:latin typeface="Aptos"/>
               </a:rPr>
-              <a:t>Kept the country-year grain for comparisons over time.</a:t>
-            </a:r>
-            <a:endParaRPr lang="en-US" sz="1500"/>
+              <a:t>Derived total sales, EV share and year-over-year growth are recalculated.</a:t>
+            </a:r>
+            <a:endParaRPr lang="en-US" sz="1400"/>
           </a:p>
         </p:txBody>
       </p:sp>
@@ -4686,31 +4686,31 @@
         <p:spPr>
           <a:xfrm>
             <a:off x="6473952" y="2286000"/>
-            <a:ext cx="4709160" cy="594360"/>
-          </a:xfrm>
-          <a:prstGeom prst="rect">
-            <a:avLst/>
-          </a:prstGeom>
-          <a:noFill/>
-          <a:ln>
-            <a:noFill/>
-          </a:ln>
-        </p:spPr>
-        <p:txBody>
-          <a:bodyPr wrap="square" anchor="ctr" lIns="18288" rIns="18288" tIns="18288" bIns="18288"/>
-          <a:lstStyle/>
-          <a:p>
-            <a:pPr/>
-            <a:r>
-              <a:rPr lang="en-US" sz="1600" b="1">
+            <a:ext cx="4709160" cy="621792"/>
+          </a:xfrm>
+          <a:prstGeom prst="rect">
+            <a:avLst/>
+          </a:prstGeom>
+          <a:noFill/>
+          <a:ln>
+            <a:noFill/>
+          </a:ln>
+        </p:spPr>
+        <p:txBody>
+          <a:bodyPr wrap="square" anchor="ctr" lIns="18288" rIns="18288" tIns="18288" bIns="18288"/>
+          <a:lstStyle/>
+          <a:p>
+            <a:pPr/>
+            <a:r>
+              <a:rPr lang="en-US" sz="1500" b="1">
                 <a:solidFill>
                   <a:srgbClr val="183B56"/>
                 </a:solidFill>
                 <a:latin typeface="Aptos"/>
               </a:rPr>
-              <a:t>No missing country or year values in the saved 400-row file.</a:t>
-            </a:r>
-            <a:endParaRPr lang="en-US" sz="1600"/>
+              <a:t>0 exact duplicate rows; 0 missing country/year identifiers; 0 negative sales values.</a:t>
+            </a:r>
+            <a:endParaRPr lang="en-US" sz="1500"/>
           </a:p>
         </p:txBody>
       </p:sp>
@@ -4722,8 +4722,8 @@
         </p:nvSpPr>
         <p:spPr>
           <a:xfrm>
-            <a:off x="6473952" y="3182112"/>
-            <a:ext cx="4709160" cy="658368"/>
+            <a:off x="6473952" y="3136392"/>
+            <a:ext cx="4709160" cy="713232"/>
           </a:xfrm>
           <a:prstGeom prst="rect">
             <a:avLst/>
@@ -4745,7 +4745,7 @@
                 </a:solidFill>
                 <a:latin typeface="Aptos"/>
               </a:rPr>
-              <a:t>25 missing values in ev_growth_rate_yoy; the current views do not use that field.</a:t>
+              <a:t>25 missing growth values are the first year for each country, where no prior year exists.</a:t>
             </a:r>
             <a:endParaRPr lang="en-US" sz="1400"/>
           </a:p>
@@ -4759,75 +4759,97 @@
         </p:nvSpPr>
         <p:spPr>
           <a:xfrm>
-            <a:off x="6473952" y="4178808"/>
-            <a:ext cx="4709160" cy="804672"/>
-          </a:xfrm>
-          <a:prstGeom prst="rect">
-            <a:avLst/>
-          </a:prstGeom>
-          <a:noFill/>
-          <a:ln>
-            <a:noFill/>
-          </a:ln>
-        </p:spPr>
-        <p:txBody>
-          <a:bodyPr wrap="square" anchor="ctr" lIns="18288" rIns="18288" tIns="18288" bIns="18288"/>
-          <a:lstStyle/>
-          <a:p>
-            <a:pPr/>
-            <a:r>
-              <a:rPr lang="en-US" sz="1400" b="0">
+            <a:off x="6473952" y="4096512"/>
+            <a:ext cx="4709160" cy="877824"/>
+          </a:xfrm>
+          <a:prstGeom prst="rect">
+            <a:avLst/>
+          </a:prstGeom>
+          <a:noFill/>
+          <a:ln>
+            <a:noFill/>
+          </a:ln>
+        </p:spPr>
+        <p:txBody>
+          <a:bodyPr wrap="square" anchor="ctr" lIns="18288" rIns="18288" tIns="18288" bIns="18288"/>
+          <a:lstStyle/>
+          <a:p>
+            <a:pPr/>
+            <a:r>
+              <a:rPr lang="en-US" sz="1300" b="0">
                 <a:solidFill>
                   <a:srgbClr val="183B56"/>
                 </a:solidFill>
                 <a:latin typeface="Aptos"/>
               </a:rPr>
-              <a:t>Country means are unweighted. Country-level patterns do not establish that charging access causes EV adoption or emissions changes.</a:t>
-            </a:r>
-            <a:endParaRPr lang="en-US" sz="1400"/>
-          </a:p>
-        </p:txBody>
-      </p:sp>
-      <p:sp>
-        <p:nvSpPr>
-          <p:cNvPr id="19" name="Text 19"/>
-          <p:cNvSpPr txBox="1"/>
-          <p:nvPr/>
-        </p:nvSpPr>
-        <p:spPr>
-          <a:xfrm>
-            <a:off x="822960" y="5715000"/>
-            <a:ext cx="10149840" cy="310896"/>
-          </a:xfrm>
-          <a:prstGeom prst="rect">
-            <a:avLst/>
-          </a:prstGeom>
-          <a:noFill/>
-          <a:ln>
-            <a:noFill/>
-          </a:ln>
-        </p:spPr>
-        <p:txBody>
-          <a:bodyPr wrap="square" anchor="ctr" lIns="18288" rIns="18288" tIns="18288" bIns="18288"/>
-          <a:lstStyle/>
-          <a:p>
-            <a:pPr/>
-            <a:r>
-              <a:rPr lang="en-US" sz="1150" b="0">
-                <a:solidFill>
-                  <a:srgbClr val="526777"/>
-                </a:solidFill>
-                <a:latin typeface="Aptos"/>
-              </a:rPr>
-              <a:t>Pipeline files: CleanData.ipynb  →  ev_vs_petrol_dataset_cleaned.csv  →  Graph.ipynb / app.py</a:t>
-            </a:r>
-            <a:endParaRPr lang="en-US" sz="1150"/>
-          </a:p>
-        </p:txBody>
+              <a:t>IQR flags 50 market-share, 39 station-count, 32 emissions and 46 EV-sales candidates; none are deleted without evidence.</a:t>
+            </a:r>
+            <a:endParaRPr lang="en-US" sz="1300"/>
+          </a:p>
+        </p:txBody>
+      </p:sp>
+      <p:sp>
+        <p:nvSpPr>
+          <p:cNvPr id="19" name="Shape 19"/>
+          <p:cNvSpPr/>
+          <p:nvPr/>
+        </p:nvSpPr>
+        <p:spPr>
+          <a:xfrm>
+            <a:off x="822960" y="5413248"/>
+            <a:ext cx="10332720" cy="530352"/>
+          </a:xfrm>
+          <a:prstGeom prst="rect">
+            <a:avLst/>
+          </a:prstGeom>
+          <a:solidFill>
+            <a:srgbClr val="FFF3D8"/>
+          </a:solidFill>
+          <a:ln>
+            <a:noFill/>
+          </a:ln>
+        </p:spPr>
       </p:sp>
       <p:sp>
         <p:nvSpPr>
           <p:cNvPr id="20" name="Text 20"/>
+          <p:cNvSpPr txBox="1"/>
+          <p:nvPr/>
+        </p:nvSpPr>
+        <p:spPr>
+          <a:xfrm>
+            <a:off x="987552" y="5486400"/>
+            <a:ext cx="10012680" cy="347472"/>
+          </a:xfrm>
+          <a:prstGeom prst="rect">
+            <a:avLst/>
+          </a:prstGeom>
+          <a:noFill/>
+          <a:ln>
+            <a:noFill/>
+          </a:ln>
+        </p:spPr>
+        <p:txBody>
+          <a:bodyPr wrap="square" anchor="ctr" lIns="18288" rIns="18288" tIns="18288" bIns="18288"/>
+          <a:lstStyle/>
+          <a:p>
+            <a:pPr/>
+            <a:r>
+              <a:rPr lang="en-US" sz="1200" b="1">
+                <a:solidFill>
+                  <a:srgbClr val="183B56"/>
+                </a:solidFill>
+                <a:latin typeface="Aptos"/>
+              </a:rPr>
+              <a:t>Verify the meaning of the three source records per country-year before treating their sales sum as valid.</a:t>
+            </a:r>
+            <a:endParaRPr lang="en-US" sz="1200"/>
+          </a:p>
+        </p:txBody>
+      </p:sp>
+      <p:sp>
+        <p:nvSpPr>
+          <p:cNvPr id="21" name="Text 21"/>
           <p:cNvSpPr txBox="1"/>
           <p:nvPr/>
         </p:nvSpPr>
@@ -7461,51 +7483,75 @@
         </p:nvSpPr>
         <p:spPr>
           <a:xfrm>
-            <a:off x="9372600" y="3931920"/>
-            <a:ext cx="2057400" cy="777240"/>
-          </a:xfrm>
-          <a:prstGeom prst="rect">
-            <a:avLst/>
-          </a:prstGeom>
-          <a:noFill/>
-          <a:ln>
-            <a:noFill/>
-          </a:ln>
-        </p:spPr>
-        <p:txBody>
-          <a:bodyPr wrap="square" anchor="ctr" lIns="18288" rIns="18288" tIns="18288" bIns="18288"/>
-          <a:lstStyle/>
-          <a:p>
-            <a:pPr/>
-            <a:r>
-              <a:rPr lang="en-US" sz="1300" b="0">
-                <a:solidFill>
-                  <a:srgbClr val="183B56"/>
-                </a:solidFill>
-                <a:latin typeface="Aptos"/>
-              </a:rPr>
-              <a:t>Sweden 53.00%</a:t>
-            </a:r>
-            <a:endParaRPr lang="en-US" sz="1300"/>
-          </a:p>
-          <a:p>
-            <a:pPr/>
-            <a:r>
-              <a:rPr lang="en-US" sz="1300" b="0">
-                <a:solidFill>
-                  <a:srgbClr val="183B56"/>
-                </a:solidFill>
-                <a:latin typeface="Aptos"/>
-              </a:rPr>
-              <a:t>China 41.23%</a:t>
-            </a:r>
-            <a:endParaRPr lang="en-US" sz="1300"/>
+            <a:off x="9372600" y="3840480"/>
+            <a:ext cx="2057400" cy="457200"/>
+          </a:xfrm>
+          <a:prstGeom prst="rect">
+            <a:avLst/>
+          </a:prstGeom>
+          <a:noFill/>
+          <a:ln>
+            <a:noFill/>
+          </a:ln>
+        </p:spPr>
+        <p:txBody>
+          <a:bodyPr wrap="square" anchor="ctr" lIns="18288" rIns="18288" tIns="18288" bIns="18288"/>
+          <a:lstStyle/>
+          <a:p>
+            <a:pPr/>
+            <a:r>
+              <a:rPr lang="en-US" sz="2100" b="1">
+                <a:solidFill>
+                  <a:srgbClr val="0072B2"/>
+                </a:solidFill>
+                <a:latin typeface="Aptos"/>
+              </a:rPr>
+              <a:t>ρ = 0.88</a:t>
+            </a:r>
+            <a:endParaRPr lang="en-US" sz="2100"/>
           </a:p>
         </p:txBody>
       </p:sp>
       <p:sp>
         <p:nvSpPr>
           <p:cNvPr id="33" name="Text 33"/>
+          <p:cNvSpPr txBox="1"/>
+          <p:nvPr/>
+        </p:nvSpPr>
+        <p:spPr>
+          <a:xfrm>
+            <a:off x="9372600" y="4370832"/>
+            <a:ext cx="2148840" cy="1005840"/>
+          </a:xfrm>
+          <a:prstGeom prst="rect">
+            <a:avLst/>
+          </a:prstGeom>
+          <a:noFill/>
+          <a:ln>
+            <a:noFill/>
+          </a:ln>
+        </p:spPr>
+        <p:txBody>
+          <a:bodyPr wrap="square" anchor="ctr" lIns="18288" rIns="18288" tIns="18288" bIns="18288"/>
+          <a:lstStyle/>
+          <a:p>
+            <a:pPr/>
+            <a:r>
+              <a:rPr lang="en-US" sz="1200" b="0">
+                <a:solidFill>
+                  <a:srgbClr val="526777"/>
+                </a:solidFill>
+                <a:latin typeface="Aptos"/>
+              </a:rPr>
+              <a:t>Spearman rank association for 375 country-years with positive station counts.</a:t>
+            </a:r>
+            <a:endParaRPr lang="en-US" sz="1200"/>
+          </a:p>
+        </p:txBody>
+      </p:sp>
+      <p:sp>
+        <p:nvSpPr>
+          <p:cNvPr id="34" name="Text 34"/>
           <p:cNvSpPr txBox="1"/>
           <p:nvPr/>
         </p:nvSpPr>
@@ -7534,7 +7580,7 @@
                 </a:solidFill>
                 <a:latin typeface="Aptos"/>
               </a:rPr>
-              <a:t>A country ranking describes reported market shares; it does not explain why countries differ.</a:t>
+              <a:t>Country and time differences may confound the pooled association; it is not causal evidence.</a:t>
             </a:r>
             <a:endParaRPr lang="en-US" sz="1200"/>
           </a:p>
@@ -7542,7 +7588,7 @@
       </p:sp>
       <p:sp>
         <p:nvSpPr>
-          <p:cNvPr id="34" name="Text 34"/>
+          <p:cNvPr id="35" name="Text 35"/>
           <p:cNvSpPr txBox="1"/>
           <p:nvPr/>
         </p:nvSpPr>
@@ -8025,31 +8071,31 @@
         <p:spPr>
           <a:xfrm>
             <a:off x="6620256" y="2267712"/>
-            <a:ext cx="4599432" cy="658368"/>
-          </a:xfrm>
-          <a:prstGeom prst="rect">
-            <a:avLst/>
-          </a:prstGeom>
-          <a:noFill/>
-          <a:ln>
-            <a:noFill/>
-          </a:ln>
-        </p:spPr>
-        <p:txBody>
-          <a:bodyPr wrap="square" anchor="ctr" lIns="18288" rIns="18288" tIns="18288" bIns="18288"/>
-          <a:lstStyle/>
-          <a:p>
-            <a:pPr/>
-            <a:r>
-              <a:rPr lang="en-US" sz="1400" b="0">
+            <a:ext cx="4599432" cy="566928"/>
+          </a:xfrm>
+          <a:prstGeom prst="rect">
+            <a:avLst/>
+          </a:prstGeom>
+          <a:noFill/>
+          <a:ln>
+            <a:noFill/>
+          </a:ln>
+        </p:spPr>
+        <p:txBody>
+          <a:bodyPr wrap="square" anchor="ctr" lIns="18288" rIns="18288" tIns="18288" bIns="18288"/>
+          <a:lstStyle/>
+          <a:p>
+            <a:pPr/>
+            <a:r>
+              <a:rPr lang="en-US" sz="1350" b="0">
                 <a:solidFill>
                   <a:srgbClr val="183B56"/>
                 </a:solidFill>
                 <a:latin typeface="Aptos"/>
               </a:rPr>
-              <a:t>Run the three-task peer test with the author silent.</a:t>
-            </a:r>
-            <a:endParaRPr lang="en-US" sz="1400"/>
+              <a:t>Check contrast and colour-vision simulation on the projected display.</a:t>
+            </a:r>
+            <a:endParaRPr lang="en-US" sz="1350"/>
           </a:p>
         </p:txBody>
       </p:sp>
@@ -8061,7 +8107,7 @@
         </p:nvSpPr>
         <p:spPr>
           <a:xfrm>
-            <a:off x="6419088" y="3099816"/>
+            <a:off x="6419088" y="3008376"/>
             <a:ext cx="82296" cy="82296"/>
           </a:xfrm>
           <a:prstGeom prst="rect">
@@ -8083,32 +8129,32 @@
         </p:nvSpPr>
         <p:spPr>
           <a:xfrm>
-            <a:off x="6620256" y="2980944"/>
-            <a:ext cx="4599432" cy="658368"/>
-          </a:xfrm>
-          <a:prstGeom prst="rect">
-            <a:avLst/>
-          </a:prstGeom>
-          <a:noFill/>
-          <a:ln>
-            <a:noFill/>
-          </a:ln>
-        </p:spPr>
-        <p:txBody>
-          <a:bodyPr wrap="square" anchor="ctr" lIns="18288" rIns="18288" tIns="18288" bIns="18288"/>
-          <a:lstStyle/>
-          <a:p>
-            <a:pPr/>
-            <a:r>
-              <a:rPr lang="en-US" sz="1400" b="0">
+            <a:off x="6620256" y="2889504"/>
+            <a:ext cx="4599432" cy="566928"/>
+          </a:xfrm>
+          <a:prstGeom prst="rect">
+            <a:avLst/>
+          </a:prstGeom>
+          <a:noFill/>
+          <a:ln>
+            <a:noFill/>
+          </a:ln>
+        </p:spPr>
+        <p:txBody>
+          <a:bodyPr wrap="square" anchor="ctr" lIns="18288" rIns="18288" tIns="18288" bIns="18288"/>
+          <a:lstStyle/>
+          <a:p>
+            <a:pPr/>
+            <a:r>
+              <a:rPr lang="en-US" sz="1350" b="0">
                 <a:solidFill>
                   <a:srgbClr val="183B56"/>
                 </a:solidFill>
                 <a:latin typeface="Aptos"/>
               </a:rPr>
-              <a:t>Record answer correctness and time; fix the two main hesitations.</a:t>
-            </a:r>
-            <a:endParaRPr lang="en-US" sz="1400"/>
+              <a:t>Run the three-task peer test with the author silent.</a:t>
+            </a:r>
+            <a:endParaRPr lang="en-US" sz="1350"/>
           </a:p>
         </p:txBody>
       </p:sp>
@@ -8120,7 +8166,7 @@
         </p:nvSpPr>
         <p:spPr>
           <a:xfrm>
-            <a:off x="6419088" y="3813048"/>
+            <a:off x="6419088" y="3630168"/>
             <a:ext cx="82296" cy="82296"/>
           </a:xfrm>
           <a:prstGeom prst="rect">
@@ -8142,32 +8188,32 @@
         </p:nvSpPr>
         <p:spPr>
           <a:xfrm>
-            <a:off x="6620256" y="3694176"/>
-            <a:ext cx="4599432" cy="658368"/>
-          </a:xfrm>
-          <a:prstGeom prst="rect">
-            <a:avLst/>
-          </a:prstGeom>
-          <a:noFill/>
-          <a:ln>
-            <a:noFill/>
-          </a:ln>
-        </p:spPr>
-        <p:txBody>
-          <a:bodyPr wrap="square" anchor="ctr" lIns="18288" rIns="18288" tIns="18288" bIns="18288"/>
-          <a:lstStyle/>
-          <a:p>
-            <a:pPr/>
-            <a:r>
-              <a:rPr lang="en-US" sz="1400" b="0">
+            <a:off x="6620256" y="3511296"/>
+            <a:ext cx="4599432" cy="566928"/>
+          </a:xfrm>
+          <a:prstGeom prst="rect">
+            <a:avLst/>
+          </a:prstGeom>
+          <a:noFill/>
+          <a:ln>
+            <a:noFill/>
+          </a:ln>
+        </p:spPr>
+        <p:txBody>
+          <a:bodyPr wrap="square" anchor="ctr" lIns="18288" rIns="18288" tIns="18288" bIns="18288"/>
+          <a:lstStyle/>
+          <a:p>
+            <a:pPr/>
+            <a:r>
+              <a:rPr lang="en-US" sz="1350" b="0">
                 <a:solidFill>
                   <a:srgbClr val="183B56"/>
                 </a:solidFill>
                 <a:latin typeface="Aptos"/>
               </a:rPr>
-              <a:t>Add real before/after screenshots and the iteration log.</a:t>
-            </a:r>
-            <a:endParaRPr lang="en-US" sz="1400"/>
+              <a:t>Record answer correctness and time; fix the two main hesitations.</a:t>
+            </a:r>
+            <a:endParaRPr lang="en-US" sz="1350"/>
           </a:p>
         </p:txBody>
       </p:sp>
@@ -8179,7 +8225,7 @@
         </p:nvSpPr>
         <p:spPr>
           <a:xfrm>
-            <a:off x="6419088" y="4526280"/>
+            <a:off x="6419088" y="4251960"/>
             <a:ext cx="82296" cy="82296"/>
           </a:xfrm>
           <a:prstGeom prst="rect">
@@ -8201,38 +8247,97 @@
         </p:nvSpPr>
         <p:spPr>
           <a:xfrm>
-            <a:off x="6620256" y="4407408"/>
-            <a:ext cx="4599432" cy="658368"/>
-          </a:xfrm>
-          <a:prstGeom prst="rect">
-            <a:avLst/>
-          </a:prstGeom>
-          <a:noFill/>
-          <a:ln>
-            <a:noFill/>
-          </a:ln>
-        </p:spPr>
-        <p:txBody>
-          <a:bodyPr wrap="square" anchor="ctr" lIns="18288" rIns="18288" tIns="18288" bIns="18288"/>
-          <a:lstStyle/>
-          <a:p>
-            <a:pPr/>
-            <a:r>
-              <a:rPr lang="en-US" sz="1400" b="0">
+            <a:off x="6620256" y="4133088"/>
+            <a:ext cx="4599432" cy="566928"/>
+          </a:xfrm>
+          <a:prstGeom prst="rect">
+            <a:avLst/>
+          </a:prstGeom>
+          <a:noFill/>
+          <a:ln>
+            <a:noFill/>
+          </a:ln>
+        </p:spPr>
+        <p:txBody>
+          <a:bodyPr wrap="square" anchor="ctr" lIns="18288" rIns="18288" tIns="18288" bIns="18288"/>
+          <a:lstStyle/>
+          <a:p>
+            <a:pPr/>
+            <a:r>
+              <a:rPr lang="en-US" sz="1350" b="0">
                 <a:solidFill>
                   <a:srgbClr val="183B56"/>
                 </a:solidFill>
                 <a:latin typeface="Aptos"/>
               </a:rPr>
-              <a:t>Append the team's actual AI disclosure and one reasoned rejection, if applicable.</a:t>
-            </a:r>
-            <a:endParaRPr lang="en-US" sz="1400"/>
+              <a:t>Add real before/after screenshots and the iteration log.</a:t>
+            </a:r>
+            <a:endParaRPr lang="en-US" sz="1350"/>
           </a:p>
         </p:txBody>
       </p:sp>
       <p:sp>
         <p:nvSpPr>
           <p:cNvPr id="23" name="Shape 23"/>
+          <p:cNvSpPr/>
+          <p:nvPr/>
+        </p:nvSpPr>
+        <p:spPr>
+          <a:xfrm>
+            <a:off x="6419088" y="4873752"/>
+            <a:ext cx="82296" cy="82296"/>
+          </a:xfrm>
+          <a:prstGeom prst="rect">
+            <a:avLst/>
+          </a:prstGeom>
+          <a:solidFill>
+            <a:srgbClr val="E69F00"/>
+          </a:solidFill>
+          <a:ln>
+            <a:noFill/>
+          </a:ln>
+        </p:spPr>
+      </p:sp>
+      <p:sp>
+        <p:nvSpPr>
+          <p:cNvPr id="24" name="Text 24"/>
+          <p:cNvSpPr txBox="1"/>
+          <p:nvPr/>
+        </p:nvSpPr>
+        <p:spPr>
+          <a:xfrm>
+            <a:off x="6620256" y="4754880"/>
+            <a:ext cx="4599432" cy="566928"/>
+          </a:xfrm>
+          <a:prstGeom prst="rect">
+            <a:avLst/>
+          </a:prstGeom>
+          <a:noFill/>
+          <a:ln>
+            <a:noFill/>
+          </a:ln>
+        </p:spPr>
+        <p:txBody>
+          <a:bodyPr wrap="square" anchor="ctr" lIns="18288" rIns="18288" tIns="18288" bIns="18288"/>
+          <a:lstStyle/>
+          <a:p>
+            <a:pPr/>
+            <a:r>
+              <a:rPr lang="en-US" sz="1350" b="0">
+                <a:solidFill>
+                  <a:srgbClr val="183B56"/>
+                </a:solidFill>
+                <a:latin typeface="Aptos"/>
+              </a:rPr>
+              <a:t>Append the AI disclosure and one real, reasoned AI-suggestion rejection.</a:t>
+            </a:r>
+            <a:endParaRPr lang="en-US" sz="1350"/>
+          </a:p>
+        </p:txBody>
+      </p:sp>
+      <p:sp>
+        <p:nvSpPr>
+          <p:cNvPr id="25" name="Shape 25"/>
           <p:cNvSpPr/>
           <p:nvPr/>
         </p:nvSpPr>
@@ -8254,7 +8359,7 @@
       </p:sp>
       <p:sp>
         <p:nvSpPr>
-          <p:cNvPr id="24" name="Text 24"/>
+          <p:cNvPr id="26" name="Text 26"/>
           <p:cNvSpPr txBox="1"/>
           <p:nvPr/>
         </p:nvSpPr>
@@ -8291,7 +8396,7 @@
       </p:sp>
       <p:sp>
         <p:nvSpPr>
-          <p:cNvPr id="25" name="Text 25"/>
+          <p:cNvPr id="27" name="Text 27"/>
           <p:cNvSpPr txBox="1"/>
           <p:nvPr/>
         </p:nvSpPr>
